--- a/Тема 4/ДВ_3_ИИ_Практика_4-3.pptx
+++ b/Тема 4/ДВ_3_ИИ_Практика_4-3.pptx
@@ -219,7 +219,7 @@
           <a:p>
             <a:fld id="{B329370D-F2D9-4CCE-A730-8C5295B5F53C}" type="datetimeFigureOut">
               <a:rPr lang="ru-RU" smtClean="0"/>
-              <a:t>25.03.2026</a:t>
+              <a:t>31.03.2026</a:t>
             </a:fld>
             <a:endParaRPr lang="ru-RU"/>
           </a:p>
@@ -2715,7 +2715,7 @@
           <a:p>
             <a:fld id="{E9548A2A-B373-4BED-99C6-55213C852137}" type="datetimeFigureOut">
               <a:rPr lang="ru-RU" smtClean="0"/>
-              <a:t>25.03.2026</a:t>
+              <a:t>31.03.2026</a:t>
             </a:fld>
             <a:endParaRPr lang="ru-RU"/>
           </a:p>
@@ -2883,7 +2883,7 @@
           <a:p>
             <a:fld id="{E9548A2A-B373-4BED-99C6-55213C852137}" type="datetimeFigureOut">
               <a:rPr lang="ru-RU" smtClean="0"/>
-              <a:t>25.03.2026</a:t>
+              <a:t>31.03.2026</a:t>
             </a:fld>
             <a:endParaRPr lang="ru-RU"/>
           </a:p>
@@ -3061,7 +3061,7 @@
           <a:p>
             <a:fld id="{E9548A2A-B373-4BED-99C6-55213C852137}" type="datetimeFigureOut">
               <a:rPr lang="ru-RU" smtClean="0"/>
-              <a:t>25.03.2026</a:t>
+              <a:t>31.03.2026</a:t>
             </a:fld>
             <a:endParaRPr lang="ru-RU"/>
           </a:p>
@@ -3229,7 +3229,7 @@
           <a:p>
             <a:fld id="{E9548A2A-B373-4BED-99C6-55213C852137}" type="datetimeFigureOut">
               <a:rPr lang="ru-RU" smtClean="0"/>
-              <a:t>25.03.2026</a:t>
+              <a:t>31.03.2026</a:t>
             </a:fld>
             <a:endParaRPr lang="ru-RU"/>
           </a:p>
@@ -3474,7 +3474,7 @@
           <a:p>
             <a:fld id="{E9548A2A-B373-4BED-99C6-55213C852137}" type="datetimeFigureOut">
               <a:rPr lang="ru-RU" smtClean="0"/>
-              <a:t>25.03.2026</a:t>
+              <a:t>31.03.2026</a:t>
             </a:fld>
             <a:endParaRPr lang="ru-RU"/>
           </a:p>
@@ -3703,7 +3703,7 @@
           <a:p>
             <a:fld id="{E9548A2A-B373-4BED-99C6-55213C852137}" type="datetimeFigureOut">
               <a:rPr lang="ru-RU" smtClean="0"/>
-              <a:t>25.03.2026</a:t>
+              <a:t>31.03.2026</a:t>
             </a:fld>
             <a:endParaRPr lang="ru-RU"/>
           </a:p>
@@ -4067,7 +4067,7 @@
           <a:p>
             <a:fld id="{E9548A2A-B373-4BED-99C6-55213C852137}" type="datetimeFigureOut">
               <a:rPr lang="ru-RU" smtClean="0"/>
-              <a:t>25.03.2026</a:t>
+              <a:t>31.03.2026</a:t>
             </a:fld>
             <a:endParaRPr lang="ru-RU"/>
           </a:p>
@@ -4184,7 +4184,7 @@
           <a:p>
             <a:fld id="{E9548A2A-B373-4BED-99C6-55213C852137}" type="datetimeFigureOut">
               <a:rPr lang="ru-RU" smtClean="0"/>
-              <a:t>25.03.2026</a:t>
+              <a:t>31.03.2026</a:t>
             </a:fld>
             <a:endParaRPr lang="ru-RU"/>
           </a:p>
@@ -4279,7 +4279,7 @@
           <a:p>
             <a:fld id="{E9548A2A-B373-4BED-99C6-55213C852137}" type="datetimeFigureOut">
               <a:rPr lang="ru-RU" smtClean="0"/>
-              <a:t>25.03.2026</a:t>
+              <a:t>31.03.2026</a:t>
             </a:fld>
             <a:endParaRPr lang="ru-RU"/>
           </a:p>
@@ -4554,7 +4554,7 @@
           <a:p>
             <a:fld id="{E9548A2A-B373-4BED-99C6-55213C852137}" type="datetimeFigureOut">
               <a:rPr lang="ru-RU" smtClean="0"/>
-              <a:t>25.03.2026</a:t>
+              <a:t>31.03.2026</a:t>
             </a:fld>
             <a:endParaRPr lang="ru-RU"/>
           </a:p>
@@ -4806,7 +4806,7 @@
           <a:p>
             <a:fld id="{E9548A2A-B373-4BED-99C6-55213C852137}" type="datetimeFigureOut">
               <a:rPr lang="ru-RU" smtClean="0"/>
-              <a:t>25.03.2026</a:t>
+              <a:t>31.03.2026</a:t>
             </a:fld>
             <a:endParaRPr lang="ru-RU"/>
           </a:p>
@@ -5017,7 +5017,7 @@
           <a:p>
             <a:fld id="{E9548A2A-B373-4BED-99C6-55213C852137}" type="datetimeFigureOut">
               <a:rPr lang="ru-RU" smtClean="0"/>
-              <a:t>25.03.2026</a:t>
+              <a:t>31.03.2026</a:t>
             </a:fld>
             <a:endParaRPr lang="ru-RU"/>
           </a:p>
@@ -8236,13 +8236,27 @@
                 <a:effectLst/>
                 <a:ea typeface="Cambria Math" panose="02040503050406030204" pitchFamily="18" charset="0"/>
               </a:rPr>
-              <a:t>Метка: 5 классов (</a:t>
+              <a:t>Метка: </a:t>
             </a:r>
             <a:r>
               <a:rPr lang="en-US" sz="2000" dirty="0">
                 <a:effectLst/>
                 <a:ea typeface="Cambria Math" panose="02040503050406030204" pitchFamily="18" charset="0"/>
               </a:rPr>
+              <a:t>4</a:t>
+            </a:r>
+            <a:r>
+              <a:rPr lang="ru-RU" sz="2000" dirty="0">
+                <a:effectLst/>
+                <a:ea typeface="Cambria Math" panose="02040503050406030204" pitchFamily="18" charset="0"/>
+              </a:rPr>
+              <a:t> классов (</a:t>
+            </a:r>
+            <a:r>
+              <a:rPr lang="en-US" sz="2000" dirty="0">
+                <a:effectLst/>
+                <a:ea typeface="Cambria Math" panose="02040503050406030204" pitchFamily="18" charset="0"/>
+              </a:rPr>
               <a:t>TNBC, HER2+, </a:t>
             </a:r>
             <a:r>
@@ -8267,18 +8281,11 @@
               <a:t>LumB</a:t>
             </a:r>
             <a:r>
-              <a:rPr lang="en-US" sz="2000" dirty="0">
-                <a:effectLst/>
-                <a:ea typeface="Cambria Math" panose="02040503050406030204" pitchFamily="18" charset="0"/>
-              </a:rPr>
-              <a:t>, </a:t>
-            </a:r>
-            <a:r>
               <a:rPr lang="ru-RU" sz="2000" dirty="0">
                 <a:effectLst/>
                 <a:ea typeface="Cambria Math" panose="02040503050406030204" pitchFamily="18" charset="0"/>
               </a:rPr>
-              <a:t>норма)</a:t>
+              <a:t>)</a:t>
             </a:r>
           </a:p>
           <a:p>
